--- a/assets/figures-editable/c1-c2/c2-e27.pptx
+++ b/assets/figures-editable/c1-c2/c2-e27.pptx
@@ -7,7 +7,7 @@
   <p:sldIdLst>
     <p:sldId id="256" r:id="rId7"/>
   </p:sldIdLst>
-  <p:sldSz cx="11948160" cy="7924799" type="screen4x3"/>
+  <p:sldSz cx="12191695" cy="6858000" type="screen4x3"/>
   <p:notesSz cx="6858000" cy="9144000"/>
   <p:defaultTextStyle>
     <a:defPPr>
@@ -3098,14 +3098,14 @@
       <p:grpSpPr/>
       <p:sp>
         <p:nvSpPr>
-          <p:cNvPr id="2" name="text1" descr="sci-ppt:C2-E27-001"/>
+          <p:cNvPr id="2" name="C2-E27 text 0" descr="sci-ppt:o000"/>
           <p:cNvSpPr txBox="1"/>
           <p:nvPr/>
         </p:nvSpPr>
         <p:spPr>
           <a:xfrm>
-            <a:off x="316992" y="268224"/>
-            <a:ext cx="11277600" cy="359054"/>
+            <a:off x="274320" y="118872"/>
+            <a:ext cx="11612880" cy="340105"/>
           </a:xfrm>
           <a:prstGeom prst="rect">
             <a:avLst/>
@@ -3114,7 +3114,7 @@
           <a:effectLst/>
         </p:spPr>
         <p:txBody>
-          <a:bodyPr wrap="none" lIns="27432" rIns="27432" tIns="18288" bIns="18288" anchor="ctr">
+          <a:bodyPr wrap="none" lIns="18288" rIns="18288" tIns="18288" bIns="18288" anchor="t">
             <a:spAutoFit/>
           </a:bodyPr>
           <a:lstStyle/>
@@ -3125,37 +3125,1378 @@
               </a:spcAft>
             </a:pPr>
             <a:r>
-              <a:rPr sz="1823" b="0" i="0">
+              <a:rPr sz="1900" b="1" i="0">
                 <a:solidFill>
                   <a:srgbClr val="8EDBD4"/>
                 </a:solidFill>
                 <a:latin typeface="Arial"/>
               </a:rPr>
-              <a:t>C2-E27 | Physical-variable diagram</a:t>
-            </a:r>
-          </a:p>
-        </p:txBody>
-      </p:sp>
-      <p:sp>
-        <p:nvSpPr>
-          <p:cNvPr id="3" name="ellipse2" descr="sci-ppt:C2-E27-002"/>
+              <a:t>C2-E27 · Finite-mass worked calculation</a:t>
+            </a:r>
+          </a:p>
+        </p:txBody>
+      </p:sp>
+      <p:cxnSp>
+        <p:nvCxnSpPr>
+          <p:cNvPr id="3" name="C2-E27 line 1" descr="sci-ppt:o001"/>
+          <p:cNvCxnSpPr/>
+          <p:nvPr/>
+        </p:nvCxnSpPr>
+        <p:spPr>
+          <a:xfrm>
+            <a:off x="914400" y="5029200"/>
+            <a:ext cx="5852160" cy="0"/>
+          </a:xfrm>
+          <a:prstGeom prst="line">
+            <a:avLst/>
+          </a:prstGeom>
+          <a:ln w="19050">
+            <a:solidFill>
+              <a:srgbClr val="B4C7D2"/>
+            </a:solidFill>
+          </a:ln>
+          <a:effectLst/>
+        </p:spPr>
+      </p:cxnSp>
+      <p:cxnSp>
+        <p:nvCxnSpPr>
+          <p:cNvPr id="4" name="C2-E27 line 2" descr="sci-ppt:o002"/>
+          <p:cNvCxnSpPr/>
+          <p:nvPr/>
+        </p:nvCxnSpPr>
+        <p:spPr>
+          <a:xfrm>
+            <a:off x="914400" y="1371600"/>
+            <a:ext cx="0" cy="3657600"/>
+          </a:xfrm>
+          <a:prstGeom prst="line">
+            <a:avLst/>
+          </a:prstGeom>
+          <a:ln w="19050">
+            <a:solidFill>
+              <a:srgbClr val="B4C7D2"/>
+            </a:solidFill>
+          </a:ln>
+          <a:effectLst/>
+        </p:spPr>
+      </p:cxnSp>
+      <p:cxnSp>
+        <p:nvCxnSpPr>
+          <p:cNvPr id="5" name="C2-E27 line 3" descr="sci-ppt:o003"/>
+          <p:cNvCxnSpPr/>
+          <p:nvPr/>
+        </p:nvCxnSpPr>
+        <p:spPr>
+          <a:xfrm>
+            <a:off x="1905134" y="5029200"/>
+            <a:ext cx="0" cy="64008"/>
+          </a:xfrm>
+          <a:prstGeom prst="line">
+            <a:avLst/>
+          </a:prstGeom>
+          <a:ln w="12700">
+            <a:solidFill>
+              <a:srgbClr val="B4C7D2"/>
+            </a:solidFill>
+          </a:ln>
+          <a:effectLst/>
+        </p:spPr>
+      </p:cxnSp>
+      <p:cxnSp>
+        <p:nvCxnSpPr>
+          <p:cNvPr id="6" name="C2-E27 line 4" descr="sci-ppt:o004"/>
+          <p:cNvCxnSpPr/>
+          <p:nvPr/>
+        </p:nvCxnSpPr>
+        <p:spPr>
+          <a:xfrm>
+            <a:off x="1905134" y="1371600"/>
+            <a:ext cx="0" cy="3657600"/>
+          </a:xfrm>
+          <a:prstGeom prst="line">
+            <a:avLst/>
+          </a:prstGeom>
+          <a:ln w="7620">
+            <a:solidFill>
+              <a:srgbClr val="2E4756"/>
+            </a:solidFill>
+          </a:ln>
+          <a:effectLst/>
+        </p:spPr>
+      </p:cxnSp>
+      <p:sp>
+        <p:nvSpPr>
+          <p:cNvPr id="7" name="C2-E27 text 5" descr="sci-ppt:o005"/>
+          <p:cNvSpPr txBox="1"/>
+          <p:nvPr/>
+        </p:nvSpPr>
+        <p:spPr>
+          <a:xfrm>
+            <a:off x="1447934" y="5111496"/>
+            <a:ext cx="914400" cy="208407"/>
+          </a:xfrm>
+          <a:prstGeom prst="rect">
+            <a:avLst/>
+          </a:prstGeom>
+          <a:noFill/>
+          <a:effectLst/>
+        </p:spPr>
+        <p:txBody>
+          <a:bodyPr wrap="none" lIns="18288" rIns="18288" tIns="18288" bIns="18288" anchor="t">
+            <a:spAutoFit/>
+          </a:bodyPr>
+          <a:lstStyle/>
+          <a:p>
+            <a:pPr algn="ctr">
+              <a:spcAft>
+                <a:spcPts val="0"/>
+              </a:spcAft>
+            </a:pPr>
+            <a:r>
+              <a:rPr sz="1050" b="0" i="0">
+                <a:solidFill>
+                  <a:srgbClr val="B4C7D2"/>
+                </a:solidFill>
+                <a:latin typeface="Arial"/>
+              </a:rPr>
+              <a:t>1e-06</a:t>
+            </a:r>
+          </a:p>
+        </p:txBody>
+      </p:sp>
+      <p:cxnSp>
+        <p:nvCxnSpPr>
+          <p:cNvPr id="8" name="C2-E27 line 6" descr="sci-ppt:o006"/>
+          <p:cNvCxnSpPr/>
+          <p:nvPr/>
+        </p:nvCxnSpPr>
+        <p:spPr>
+          <a:xfrm>
+            <a:off x="5196283" y="5029200"/>
+            <a:ext cx="0" cy="64008"/>
+          </a:xfrm>
+          <a:prstGeom prst="line">
+            <a:avLst/>
+          </a:prstGeom>
+          <a:ln w="12700">
+            <a:solidFill>
+              <a:srgbClr val="B4C7D2"/>
+            </a:solidFill>
+          </a:ln>
+          <a:effectLst/>
+        </p:spPr>
+      </p:cxnSp>
+      <p:cxnSp>
+        <p:nvCxnSpPr>
+          <p:cNvPr id="9" name="C2-E27 line 7" descr="sci-ppt:o007"/>
+          <p:cNvCxnSpPr/>
+          <p:nvPr/>
+        </p:nvCxnSpPr>
+        <p:spPr>
+          <a:xfrm>
+            <a:off x="5196283" y="1371600"/>
+            <a:ext cx="0" cy="3657600"/>
+          </a:xfrm>
+          <a:prstGeom prst="line">
+            <a:avLst/>
+          </a:prstGeom>
+          <a:ln w="7620">
+            <a:solidFill>
+              <a:srgbClr val="2E4756"/>
+            </a:solidFill>
+          </a:ln>
+          <a:effectLst/>
+        </p:spPr>
+      </p:cxnSp>
+      <p:sp>
+        <p:nvSpPr>
+          <p:cNvPr id="10" name="C2-E27 text 8" descr="sci-ppt:o008"/>
+          <p:cNvSpPr txBox="1"/>
+          <p:nvPr/>
+        </p:nvSpPr>
+        <p:spPr>
+          <a:xfrm>
+            <a:off x="4739083" y="5111496"/>
+            <a:ext cx="914400" cy="208407"/>
+          </a:xfrm>
+          <a:prstGeom prst="rect">
+            <a:avLst/>
+          </a:prstGeom>
+          <a:noFill/>
+          <a:effectLst/>
+        </p:spPr>
+        <p:txBody>
+          <a:bodyPr wrap="none" lIns="18288" rIns="18288" tIns="18288" bIns="18288" anchor="t">
+            <a:spAutoFit/>
+          </a:bodyPr>
+          <a:lstStyle/>
+          <a:p>
+            <a:pPr algn="ctr">
+              <a:spcAft>
+                <a:spcPts val="0"/>
+              </a:spcAft>
+            </a:pPr>
+            <a:r>
+              <a:rPr sz="1050" b="0" i="0">
+                <a:solidFill>
+                  <a:srgbClr val="B4C7D2"/>
+                </a:solidFill>
+                <a:latin typeface="Arial"/>
+              </a:rPr>
+              <a:t>1e-05</a:t>
+            </a:r>
+          </a:p>
+        </p:txBody>
+      </p:sp>
+      <p:cxnSp>
+        <p:nvCxnSpPr>
+          <p:cNvPr id="11" name="C2-E27 line 9" descr="sci-ppt:o009"/>
+          <p:cNvCxnSpPr/>
+          <p:nvPr/>
+        </p:nvCxnSpPr>
+        <p:spPr>
+          <a:xfrm>
+            <a:off x="850392" y="5029200"/>
+            <a:ext cx="64008" cy="0"/>
+          </a:xfrm>
+          <a:prstGeom prst="line">
+            <a:avLst/>
+          </a:prstGeom>
+          <a:ln w="12700">
+            <a:solidFill>
+              <a:srgbClr val="B4C7D2"/>
+            </a:solidFill>
+          </a:ln>
+          <a:effectLst/>
+        </p:spPr>
+      </p:cxnSp>
+      <p:cxnSp>
+        <p:nvCxnSpPr>
+          <p:cNvPr id="12" name="C2-E27 line 10" descr="sci-ppt:o010"/>
+          <p:cNvCxnSpPr/>
+          <p:nvPr/>
+        </p:nvCxnSpPr>
+        <p:spPr>
+          <a:xfrm>
+            <a:off x="914400" y="5029200"/>
+            <a:ext cx="5852160" cy="0"/>
+          </a:xfrm>
+          <a:prstGeom prst="line">
+            <a:avLst/>
+          </a:prstGeom>
+          <a:ln w="7620">
+            <a:solidFill>
+              <a:srgbClr val="2E4756"/>
+            </a:solidFill>
+          </a:ln>
+          <a:effectLst/>
+        </p:spPr>
+      </p:cxnSp>
+      <p:sp>
+        <p:nvSpPr>
+          <p:cNvPr id="13" name="C2-E27 text 11" descr="sci-ppt:o011"/>
+          <p:cNvSpPr txBox="1"/>
+          <p:nvPr/>
+        </p:nvSpPr>
+        <p:spPr>
+          <a:xfrm>
+            <a:off x="45720" y="4946904"/>
+            <a:ext cx="777240" cy="208407"/>
+          </a:xfrm>
+          <a:prstGeom prst="rect">
+            <a:avLst/>
+          </a:prstGeom>
+          <a:noFill/>
+          <a:effectLst/>
+        </p:spPr>
+        <p:txBody>
+          <a:bodyPr wrap="none" lIns="18288" rIns="18288" tIns="18288" bIns="18288" anchor="t">
+            <a:spAutoFit/>
+          </a:bodyPr>
+          <a:lstStyle/>
+          <a:p>
+            <a:pPr algn="r">
+              <a:spcAft>
+                <a:spcPts val="0"/>
+              </a:spcAft>
+            </a:pPr>
+            <a:r>
+              <a:rPr sz="1050" b="0" i="0">
+                <a:solidFill>
+                  <a:srgbClr val="B4C7D2"/>
+                </a:solidFill>
+                <a:latin typeface="Arial"/>
+              </a:rPr>
+              <a:t>1e-15</a:t>
+            </a:r>
+          </a:p>
+        </p:txBody>
+      </p:sp>
+      <p:cxnSp>
+        <p:nvCxnSpPr>
+          <p:cNvPr id="14" name="C2-E27 line 12" descr="sci-ppt:o012"/>
+          <p:cNvCxnSpPr/>
+          <p:nvPr/>
+        </p:nvCxnSpPr>
+        <p:spPr>
+          <a:xfrm>
+            <a:off x="850392" y="4297680"/>
+            <a:ext cx="64008" cy="0"/>
+          </a:xfrm>
+          <a:prstGeom prst="line">
+            <a:avLst/>
+          </a:prstGeom>
+          <a:ln w="12700">
+            <a:solidFill>
+              <a:srgbClr val="B4C7D2"/>
+            </a:solidFill>
+          </a:ln>
+          <a:effectLst/>
+        </p:spPr>
+      </p:cxnSp>
+      <p:cxnSp>
+        <p:nvCxnSpPr>
+          <p:cNvPr id="15" name="C2-E27 line 13" descr="sci-ppt:o013"/>
+          <p:cNvCxnSpPr/>
+          <p:nvPr/>
+        </p:nvCxnSpPr>
+        <p:spPr>
+          <a:xfrm>
+            <a:off x="914400" y="4297680"/>
+            <a:ext cx="5852160" cy="0"/>
+          </a:xfrm>
+          <a:prstGeom prst="line">
+            <a:avLst/>
+          </a:prstGeom>
+          <a:ln w="7620">
+            <a:solidFill>
+              <a:srgbClr val="2E4756"/>
+            </a:solidFill>
+          </a:ln>
+          <a:effectLst/>
+        </p:spPr>
+      </p:cxnSp>
+      <p:sp>
+        <p:nvSpPr>
+          <p:cNvPr id="16" name="C2-E27 text 14" descr="sci-ppt:o014"/>
+          <p:cNvSpPr txBox="1"/>
+          <p:nvPr/>
+        </p:nvSpPr>
+        <p:spPr>
+          <a:xfrm>
+            <a:off x="45720" y="4215384"/>
+            <a:ext cx="777240" cy="208407"/>
+          </a:xfrm>
+          <a:prstGeom prst="rect">
+            <a:avLst/>
+          </a:prstGeom>
+          <a:noFill/>
+          <a:effectLst/>
+        </p:spPr>
+        <p:txBody>
+          <a:bodyPr wrap="none" lIns="18288" rIns="18288" tIns="18288" bIns="18288" anchor="t">
+            <a:spAutoFit/>
+          </a:bodyPr>
+          <a:lstStyle/>
+          <a:p>
+            <a:pPr algn="r">
+              <a:spcAft>
+                <a:spcPts val="0"/>
+              </a:spcAft>
+            </a:pPr>
+            <a:r>
+              <a:rPr sz="1050" b="0" i="0">
+                <a:solidFill>
+                  <a:srgbClr val="B4C7D2"/>
+                </a:solidFill>
+                <a:latin typeface="Arial"/>
+              </a:rPr>
+              <a:t>1e-14</a:t>
+            </a:r>
+          </a:p>
+        </p:txBody>
+      </p:sp>
+      <p:cxnSp>
+        <p:nvCxnSpPr>
+          <p:cNvPr id="17" name="C2-E27 line 15" descr="sci-ppt:o015"/>
+          <p:cNvCxnSpPr/>
+          <p:nvPr/>
+        </p:nvCxnSpPr>
+        <p:spPr>
+          <a:xfrm>
+            <a:off x="850392" y="3566160"/>
+            <a:ext cx="64008" cy="0"/>
+          </a:xfrm>
+          <a:prstGeom prst="line">
+            <a:avLst/>
+          </a:prstGeom>
+          <a:ln w="12700">
+            <a:solidFill>
+              <a:srgbClr val="B4C7D2"/>
+            </a:solidFill>
+          </a:ln>
+          <a:effectLst/>
+        </p:spPr>
+      </p:cxnSp>
+      <p:cxnSp>
+        <p:nvCxnSpPr>
+          <p:cNvPr id="18" name="C2-E27 line 16" descr="sci-ppt:o016"/>
+          <p:cNvCxnSpPr/>
+          <p:nvPr/>
+        </p:nvCxnSpPr>
+        <p:spPr>
+          <a:xfrm>
+            <a:off x="914400" y="3566160"/>
+            <a:ext cx="5852160" cy="0"/>
+          </a:xfrm>
+          <a:prstGeom prst="line">
+            <a:avLst/>
+          </a:prstGeom>
+          <a:ln w="7620">
+            <a:solidFill>
+              <a:srgbClr val="2E4756"/>
+            </a:solidFill>
+          </a:ln>
+          <a:effectLst/>
+        </p:spPr>
+      </p:cxnSp>
+      <p:sp>
+        <p:nvSpPr>
+          <p:cNvPr id="19" name="C2-E27 text 17" descr="sci-ppt:o017"/>
+          <p:cNvSpPr txBox="1"/>
+          <p:nvPr/>
+        </p:nvSpPr>
+        <p:spPr>
+          <a:xfrm>
+            <a:off x="45720" y="3483864"/>
+            <a:ext cx="777240" cy="208407"/>
+          </a:xfrm>
+          <a:prstGeom prst="rect">
+            <a:avLst/>
+          </a:prstGeom>
+          <a:noFill/>
+          <a:effectLst/>
+        </p:spPr>
+        <p:txBody>
+          <a:bodyPr wrap="none" lIns="18288" rIns="18288" tIns="18288" bIns="18288" anchor="t">
+            <a:spAutoFit/>
+          </a:bodyPr>
+          <a:lstStyle/>
+          <a:p>
+            <a:pPr algn="r">
+              <a:spcAft>
+                <a:spcPts val="0"/>
+              </a:spcAft>
+            </a:pPr>
+            <a:r>
+              <a:rPr sz="1050" b="0" i="0">
+                <a:solidFill>
+                  <a:srgbClr val="B4C7D2"/>
+                </a:solidFill>
+                <a:latin typeface="Arial"/>
+              </a:rPr>
+              <a:t>1e-13</a:t>
+            </a:r>
+          </a:p>
+        </p:txBody>
+      </p:sp>
+      <p:cxnSp>
+        <p:nvCxnSpPr>
+          <p:cNvPr id="20" name="C2-E27 line 18" descr="sci-ppt:o018"/>
+          <p:cNvCxnSpPr/>
+          <p:nvPr/>
+        </p:nvCxnSpPr>
+        <p:spPr>
+          <a:xfrm>
+            <a:off x="850392" y="2834640"/>
+            <a:ext cx="64008" cy="0"/>
+          </a:xfrm>
+          <a:prstGeom prst="line">
+            <a:avLst/>
+          </a:prstGeom>
+          <a:ln w="12700">
+            <a:solidFill>
+              <a:srgbClr val="B4C7D2"/>
+            </a:solidFill>
+          </a:ln>
+          <a:effectLst/>
+        </p:spPr>
+      </p:cxnSp>
+      <p:cxnSp>
+        <p:nvCxnSpPr>
+          <p:cNvPr id="21" name="C2-E27 line 19" descr="sci-ppt:o019"/>
+          <p:cNvCxnSpPr/>
+          <p:nvPr/>
+        </p:nvCxnSpPr>
+        <p:spPr>
+          <a:xfrm>
+            <a:off x="914400" y="2834640"/>
+            <a:ext cx="5852160" cy="0"/>
+          </a:xfrm>
+          <a:prstGeom prst="line">
+            <a:avLst/>
+          </a:prstGeom>
+          <a:ln w="7620">
+            <a:solidFill>
+              <a:srgbClr val="2E4756"/>
+            </a:solidFill>
+          </a:ln>
+          <a:effectLst/>
+        </p:spPr>
+      </p:cxnSp>
+      <p:sp>
+        <p:nvSpPr>
+          <p:cNvPr id="22" name="C2-E27 text 20" descr="sci-ppt:o020"/>
+          <p:cNvSpPr txBox="1"/>
+          <p:nvPr/>
+        </p:nvSpPr>
+        <p:spPr>
+          <a:xfrm>
+            <a:off x="45720" y="2752344"/>
+            <a:ext cx="777240" cy="208407"/>
+          </a:xfrm>
+          <a:prstGeom prst="rect">
+            <a:avLst/>
+          </a:prstGeom>
+          <a:noFill/>
+          <a:effectLst/>
+        </p:spPr>
+        <p:txBody>
+          <a:bodyPr wrap="none" lIns="18288" rIns="18288" tIns="18288" bIns="18288" anchor="t">
+            <a:spAutoFit/>
+          </a:bodyPr>
+          <a:lstStyle/>
+          <a:p>
+            <a:pPr algn="r">
+              <a:spcAft>
+                <a:spcPts val="0"/>
+              </a:spcAft>
+            </a:pPr>
+            <a:r>
+              <a:rPr sz="1050" b="0" i="0">
+                <a:solidFill>
+                  <a:srgbClr val="B4C7D2"/>
+                </a:solidFill>
+                <a:latin typeface="Arial"/>
+              </a:rPr>
+              <a:t>1e-12</a:t>
+            </a:r>
+          </a:p>
+        </p:txBody>
+      </p:sp>
+      <p:cxnSp>
+        <p:nvCxnSpPr>
+          <p:cNvPr id="23" name="C2-E27 line 21" descr="sci-ppt:o021"/>
+          <p:cNvCxnSpPr/>
+          <p:nvPr/>
+        </p:nvCxnSpPr>
+        <p:spPr>
+          <a:xfrm>
+            <a:off x="850392" y="2103120"/>
+            <a:ext cx="64008" cy="0"/>
+          </a:xfrm>
+          <a:prstGeom prst="line">
+            <a:avLst/>
+          </a:prstGeom>
+          <a:ln w="12700">
+            <a:solidFill>
+              <a:srgbClr val="B4C7D2"/>
+            </a:solidFill>
+          </a:ln>
+          <a:effectLst/>
+        </p:spPr>
+      </p:cxnSp>
+      <p:cxnSp>
+        <p:nvCxnSpPr>
+          <p:cNvPr id="24" name="C2-E27 line 22" descr="sci-ppt:o022"/>
+          <p:cNvCxnSpPr/>
+          <p:nvPr/>
+        </p:nvCxnSpPr>
+        <p:spPr>
+          <a:xfrm>
+            <a:off x="914400" y="2103120"/>
+            <a:ext cx="5852160" cy="0"/>
+          </a:xfrm>
+          <a:prstGeom prst="line">
+            <a:avLst/>
+          </a:prstGeom>
+          <a:ln w="7620">
+            <a:solidFill>
+              <a:srgbClr val="2E4756"/>
+            </a:solidFill>
+          </a:ln>
+          <a:effectLst/>
+        </p:spPr>
+      </p:cxnSp>
+      <p:sp>
+        <p:nvSpPr>
+          <p:cNvPr id="25" name="C2-E27 text 23" descr="sci-ppt:o023"/>
+          <p:cNvSpPr txBox="1"/>
+          <p:nvPr/>
+        </p:nvSpPr>
+        <p:spPr>
+          <a:xfrm>
+            <a:off x="45720" y="2020824"/>
+            <a:ext cx="777240" cy="208407"/>
+          </a:xfrm>
+          <a:prstGeom prst="rect">
+            <a:avLst/>
+          </a:prstGeom>
+          <a:noFill/>
+          <a:effectLst/>
+        </p:spPr>
+        <p:txBody>
+          <a:bodyPr wrap="none" lIns="18288" rIns="18288" tIns="18288" bIns="18288" anchor="t">
+            <a:spAutoFit/>
+          </a:bodyPr>
+          <a:lstStyle/>
+          <a:p>
+            <a:pPr algn="r">
+              <a:spcAft>
+                <a:spcPts val="0"/>
+              </a:spcAft>
+            </a:pPr>
+            <a:r>
+              <a:rPr sz="1050" b="0" i="0">
+                <a:solidFill>
+                  <a:srgbClr val="B4C7D2"/>
+                </a:solidFill>
+                <a:latin typeface="Arial"/>
+              </a:rPr>
+              <a:t>1e-11</a:t>
+            </a:r>
+          </a:p>
+        </p:txBody>
+      </p:sp>
+      <p:cxnSp>
+        <p:nvCxnSpPr>
+          <p:cNvPr id="26" name="C2-E27 line 24" descr="sci-ppt:o024"/>
+          <p:cNvCxnSpPr/>
+          <p:nvPr/>
+        </p:nvCxnSpPr>
+        <p:spPr>
+          <a:xfrm>
+            <a:off x="850392" y="1371600"/>
+            <a:ext cx="64008" cy="0"/>
+          </a:xfrm>
+          <a:prstGeom prst="line">
+            <a:avLst/>
+          </a:prstGeom>
+          <a:ln w="12700">
+            <a:solidFill>
+              <a:srgbClr val="B4C7D2"/>
+            </a:solidFill>
+          </a:ln>
+          <a:effectLst/>
+        </p:spPr>
+      </p:cxnSp>
+      <p:cxnSp>
+        <p:nvCxnSpPr>
+          <p:cNvPr id="27" name="C2-E27 line 25" descr="sci-ppt:o025"/>
+          <p:cNvCxnSpPr/>
+          <p:nvPr/>
+        </p:nvCxnSpPr>
+        <p:spPr>
+          <a:xfrm>
+            <a:off x="914400" y="1371600"/>
+            <a:ext cx="5852160" cy="0"/>
+          </a:xfrm>
+          <a:prstGeom prst="line">
+            <a:avLst/>
+          </a:prstGeom>
+          <a:ln w="7620">
+            <a:solidFill>
+              <a:srgbClr val="2E4756"/>
+            </a:solidFill>
+          </a:ln>
+          <a:effectLst/>
+        </p:spPr>
+      </p:cxnSp>
+      <p:sp>
+        <p:nvSpPr>
+          <p:cNvPr id="28" name="C2-E27 text 26" descr="sci-ppt:o026"/>
+          <p:cNvSpPr txBox="1"/>
+          <p:nvPr/>
+        </p:nvSpPr>
+        <p:spPr>
+          <a:xfrm>
+            <a:off x="45720" y="1289304"/>
+            <a:ext cx="777240" cy="208407"/>
+          </a:xfrm>
+          <a:prstGeom prst="rect">
+            <a:avLst/>
+          </a:prstGeom>
+          <a:noFill/>
+          <a:effectLst/>
+        </p:spPr>
+        <p:txBody>
+          <a:bodyPr wrap="none" lIns="18288" rIns="18288" tIns="18288" bIns="18288" anchor="t">
+            <a:spAutoFit/>
+          </a:bodyPr>
+          <a:lstStyle/>
+          <a:p>
+            <a:pPr algn="r">
+              <a:spcAft>
+                <a:spcPts val="0"/>
+              </a:spcAft>
+            </a:pPr>
+            <a:r>
+              <a:rPr sz="1050" b="0" i="0">
+                <a:solidFill>
+                  <a:srgbClr val="B4C7D2"/>
+                </a:solidFill>
+                <a:latin typeface="Arial"/>
+              </a:rPr>
+              <a:t>1e-10</a:t>
+            </a:r>
+          </a:p>
+        </p:txBody>
+      </p:sp>
+      <p:sp>
+        <p:nvSpPr>
+          <p:cNvPr id="29" name="C2-E27 text 27" descr="sci-ppt:o027"/>
+          <p:cNvSpPr txBox="1"/>
+          <p:nvPr/>
+        </p:nvSpPr>
+        <p:spPr>
+          <a:xfrm>
+            <a:off x="914400" y="5312664"/>
+            <a:ext cx="5852160" cy="231648"/>
+          </a:xfrm>
+          <a:prstGeom prst="rect">
+            <a:avLst/>
+          </a:prstGeom>
+          <a:noFill/>
+          <a:effectLst/>
+        </p:spPr>
+        <p:txBody>
+          <a:bodyPr wrap="none" lIns="18288" rIns="18288" tIns="18288" bIns="18288" anchor="t">
+            <a:spAutoFit/>
+          </a:bodyPr>
+          <a:lstStyle/>
+          <a:p>
+            <a:pPr algn="ctr">
+              <a:spcAft>
+                <a:spcPts val="0"/>
+              </a:spcAft>
+            </a:pPr>
+            <a:r>
+              <a:rPr sz="1200" b="0" i="0">
+                <a:solidFill>
+                  <a:srgbClr val="E7F0F3"/>
+                </a:solidFill>
+                <a:latin typeface="Arial"/>
+              </a:rPr>
+              <a:t>core radius a  (m)</a:t>
+            </a:r>
+          </a:p>
+        </p:txBody>
+      </p:sp>
+      <p:sp>
+        <p:nvSpPr>
+          <p:cNvPr id="30" name="C2-E27 text 28" descr="sci-ppt:o028"/>
+          <p:cNvSpPr txBox="1"/>
+          <p:nvPr/>
+        </p:nvSpPr>
+        <p:spPr>
+          <a:xfrm>
+            <a:off x="365760" y="1024128"/>
+            <a:ext cx="5852160" cy="231648"/>
+          </a:xfrm>
+          <a:prstGeom prst="rect">
+            <a:avLst/>
+          </a:prstGeom>
+          <a:noFill/>
+          <a:effectLst/>
+        </p:spPr>
+        <p:txBody>
+          <a:bodyPr wrap="none" lIns="18288" rIns="18288" tIns="18288" bIns="18288" anchor="t">
+            <a:spAutoFit/>
+          </a:bodyPr>
+          <a:lstStyle/>
+          <a:p>
+            <a:pPr algn="l">
+              <a:spcAft>
+                <a:spcPts val="0"/>
+              </a:spcAft>
+            </a:pPr>
+            <a:r>
+              <a:rPr sz="1200" b="0" i="0">
+                <a:solidFill>
+                  <a:srgbClr val="E7F0F3"/>
+                </a:solidFill>
+                <a:latin typeface="Arial"/>
+              </a:rPr>
+              <a:t>PFC mass  (kg)</a:t>
+            </a:r>
+          </a:p>
+        </p:txBody>
+      </p:sp>
+      <p:sp>
+        <p:nvSpPr>
+          <p:cNvPr id="31" name="C2-E27 polygon 29" descr="sci-ppt:o029"/>
           <p:cNvSpPr/>
           <p:nvPr/>
         </p:nvSpPr>
         <p:spPr>
           <a:xfrm>
-            <a:off x="2072640" y="1402080"/>
-            <a:ext cx="2438400" cy="2438400"/>
+            <a:off x="1030819" y="1384210"/>
+            <a:ext cx="5425408" cy="3617699"/>
+          </a:xfrm>
+          <a:custGeom>
+            <a:avLst/>
+            <a:gdLst/>
+            <a:ahLst/>
+            <a:cxnLst/>
+            <a:rect l="l" t="t" r="r" b="b"/>
+            <a:pathLst>
+              <a:path w="5425408" h="3617699">
+                <a:moveTo>
+                  <a:pt x="0" y="3617699"/>
+                </a:moveTo>
+                <a:lnTo>
+                  <a:pt x="56514" y="3580015"/>
+                </a:lnTo>
+                <a:lnTo>
+                  <a:pt x="113029" y="3542330"/>
+                </a:lnTo>
+                <a:lnTo>
+                  <a:pt x="169544" y="3504646"/>
+                </a:lnTo>
+                <a:lnTo>
+                  <a:pt x="226058" y="3466962"/>
+                </a:lnTo>
+                <a:lnTo>
+                  <a:pt x="282573" y="3429277"/>
+                </a:lnTo>
+                <a:lnTo>
+                  <a:pt x="339088" y="3391593"/>
+                </a:lnTo>
+                <a:lnTo>
+                  <a:pt x="395602" y="3353908"/>
+                </a:lnTo>
+                <a:lnTo>
+                  <a:pt x="452117" y="3316224"/>
+                </a:lnTo>
+                <a:lnTo>
+                  <a:pt x="508632" y="3278540"/>
+                </a:lnTo>
+                <a:lnTo>
+                  <a:pt x="565146" y="3240855"/>
+                </a:lnTo>
+                <a:lnTo>
+                  <a:pt x="621661" y="3203171"/>
+                </a:lnTo>
+                <a:lnTo>
+                  <a:pt x="678176" y="3165487"/>
+                </a:lnTo>
+                <a:lnTo>
+                  <a:pt x="734690" y="3127802"/>
+                </a:lnTo>
+                <a:lnTo>
+                  <a:pt x="791205" y="3090118"/>
+                </a:lnTo>
+                <a:lnTo>
+                  <a:pt x="847720" y="3052434"/>
+                </a:lnTo>
+                <a:lnTo>
+                  <a:pt x="904234" y="3014749"/>
+                </a:lnTo>
+                <a:lnTo>
+                  <a:pt x="960749" y="2977065"/>
+                </a:lnTo>
+                <a:lnTo>
+                  <a:pt x="1017264" y="2939380"/>
+                </a:lnTo>
+                <a:lnTo>
+                  <a:pt x="1073779" y="2901696"/>
+                </a:lnTo>
+                <a:lnTo>
+                  <a:pt x="1130293" y="2864012"/>
+                </a:lnTo>
+                <a:lnTo>
+                  <a:pt x="1186808" y="2826327"/>
+                </a:lnTo>
+                <a:lnTo>
+                  <a:pt x="1243323" y="2788643"/>
+                </a:lnTo>
+                <a:lnTo>
+                  <a:pt x="1299837" y="2750959"/>
+                </a:lnTo>
+                <a:lnTo>
+                  <a:pt x="1356352" y="2713274"/>
+                </a:lnTo>
+                <a:lnTo>
+                  <a:pt x="1412867" y="2675590"/>
+                </a:lnTo>
+                <a:lnTo>
+                  <a:pt x="1469381" y="2637906"/>
+                </a:lnTo>
+                <a:lnTo>
+                  <a:pt x="1525896" y="2600221"/>
+                </a:lnTo>
+                <a:lnTo>
+                  <a:pt x="1582411" y="2562537"/>
+                </a:lnTo>
+                <a:lnTo>
+                  <a:pt x="1638925" y="2524852"/>
+                </a:lnTo>
+                <a:lnTo>
+                  <a:pt x="1695440" y="2487168"/>
+                </a:lnTo>
+                <a:lnTo>
+                  <a:pt x="1751955" y="2449484"/>
+                </a:lnTo>
+                <a:lnTo>
+                  <a:pt x="1808469" y="2411799"/>
+                </a:lnTo>
+                <a:lnTo>
+                  <a:pt x="1864984" y="2374115"/>
+                </a:lnTo>
+                <a:lnTo>
+                  <a:pt x="1921499" y="2336431"/>
+                </a:lnTo>
+                <a:lnTo>
+                  <a:pt x="1978013" y="2298746"/>
+                </a:lnTo>
+                <a:lnTo>
+                  <a:pt x="2034528" y="2261062"/>
+                </a:lnTo>
+                <a:lnTo>
+                  <a:pt x="2091043" y="2223378"/>
+                </a:lnTo>
+                <a:lnTo>
+                  <a:pt x="2147557" y="2185693"/>
+                </a:lnTo>
+                <a:lnTo>
+                  <a:pt x="2204072" y="2148009"/>
+                </a:lnTo>
+                <a:lnTo>
+                  <a:pt x="2260587" y="2110324"/>
+                </a:lnTo>
+                <a:lnTo>
+                  <a:pt x="2317101" y="2072640"/>
+                </a:lnTo>
+                <a:lnTo>
+                  <a:pt x="2373616" y="2034956"/>
+                </a:lnTo>
+                <a:lnTo>
+                  <a:pt x="2430131" y="1997271"/>
+                </a:lnTo>
+                <a:lnTo>
+                  <a:pt x="2486645" y="1959587"/>
+                </a:lnTo>
+                <a:lnTo>
+                  <a:pt x="2543160" y="1921903"/>
+                </a:lnTo>
+                <a:lnTo>
+                  <a:pt x="2599675" y="1884218"/>
+                </a:lnTo>
+                <a:lnTo>
+                  <a:pt x="2656189" y="1846534"/>
+                </a:lnTo>
+                <a:lnTo>
+                  <a:pt x="2712704" y="1808850"/>
+                </a:lnTo>
+                <a:lnTo>
+                  <a:pt x="2769219" y="1771165"/>
+                </a:lnTo>
+                <a:lnTo>
+                  <a:pt x="2825733" y="1733481"/>
+                </a:lnTo>
+                <a:lnTo>
+                  <a:pt x="2882248" y="1695796"/>
+                </a:lnTo>
+                <a:lnTo>
+                  <a:pt x="2938763" y="1658112"/>
+                </a:lnTo>
+                <a:lnTo>
+                  <a:pt x="2995277" y="1620428"/>
+                </a:lnTo>
+                <a:lnTo>
+                  <a:pt x="3051792" y="1582743"/>
+                </a:lnTo>
+                <a:lnTo>
+                  <a:pt x="3108307" y="1545059"/>
+                </a:lnTo>
+                <a:lnTo>
+                  <a:pt x="3164821" y="1507375"/>
+                </a:lnTo>
+                <a:lnTo>
+                  <a:pt x="3221336" y="1469690"/>
+                </a:lnTo>
+                <a:lnTo>
+                  <a:pt x="3277851" y="1432006"/>
+                </a:lnTo>
+                <a:lnTo>
+                  <a:pt x="3334365" y="1394322"/>
+                </a:lnTo>
+                <a:lnTo>
+                  <a:pt x="3390880" y="1356637"/>
+                </a:lnTo>
+                <a:lnTo>
+                  <a:pt x="3447395" y="1318953"/>
+                </a:lnTo>
+                <a:lnTo>
+                  <a:pt x="3503909" y="1281268"/>
+                </a:lnTo>
+                <a:lnTo>
+                  <a:pt x="3560424" y="1243584"/>
+                </a:lnTo>
+                <a:lnTo>
+                  <a:pt x="3616939" y="1205900"/>
+                </a:lnTo>
+                <a:lnTo>
+                  <a:pt x="3673453" y="1168215"/>
+                </a:lnTo>
+                <a:lnTo>
+                  <a:pt x="3729968" y="1130531"/>
+                </a:lnTo>
+                <a:lnTo>
+                  <a:pt x="3786483" y="1092847"/>
+                </a:lnTo>
+                <a:lnTo>
+                  <a:pt x="3842997" y="1055162"/>
+                </a:lnTo>
+                <a:lnTo>
+                  <a:pt x="3899512" y="1017478"/>
+                </a:lnTo>
+                <a:lnTo>
+                  <a:pt x="3956027" y="979794"/>
+                </a:lnTo>
+                <a:lnTo>
+                  <a:pt x="4012541" y="942109"/>
+                </a:lnTo>
+                <a:lnTo>
+                  <a:pt x="4069056" y="904425"/>
+                </a:lnTo>
+                <a:lnTo>
+                  <a:pt x="4125571" y="866740"/>
+                </a:lnTo>
+                <a:lnTo>
+                  <a:pt x="4182086" y="829056"/>
+                </a:lnTo>
+                <a:lnTo>
+                  <a:pt x="4238600" y="791372"/>
+                </a:lnTo>
+                <a:lnTo>
+                  <a:pt x="4295115" y="753687"/>
+                </a:lnTo>
+                <a:lnTo>
+                  <a:pt x="4351630" y="716003"/>
+                </a:lnTo>
+                <a:lnTo>
+                  <a:pt x="4408144" y="678319"/>
+                </a:lnTo>
+                <a:lnTo>
+                  <a:pt x="4464659" y="640634"/>
+                </a:lnTo>
+                <a:lnTo>
+                  <a:pt x="4521174" y="602950"/>
+                </a:lnTo>
+                <a:lnTo>
+                  <a:pt x="4577688" y="565266"/>
+                </a:lnTo>
+                <a:lnTo>
+                  <a:pt x="4634203" y="527581"/>
+                </a:lnTo>
+                <a:lnTo>
+                  <a:pt x="4690718" y="489897"/>
+                </a:lnTo>
+                <a:lnTo>
+                  <a:pt x="4747232" y="452212"/>
+                </a:lnTo>
+                <a:lnTo>
+                  <a:pt x="4803747" y="414528"/>
+                </a:lnTo>
+                <a:lnTo>
+                  <a:pt x="4860262" y="376844"/>
+                </a:lnTo>
+                <a:lnTo>
+                  <a:pt x="4916776" y="339159"/>
+                </a:lnTo>
+                <a:lnTo>
+                  <a:pt x="4973291" y="301475"/>
+                </a:lnTo>
+                <a:lnTo>
+                  <a:pt x="5029806" y="263791"/>
+                </a:lnTo>
+                <a:lnTo>
+                  <a:pt x="5086320" y="226106"/>
+                </a:lnTo>
+                <a:lnTo>
+                  <a:pt x="5142835" y="188422"/>
+                </a:lnTo>
+                <a:lnTo>
+                  <a:pt x="5199350" y="150738"/>
+                </a:lnTo>
+                <a:lnTo>
+                  <a:pt x="5255864" y="113053"/>
+                </a:lnTo>
+                <a:lnTo>
+                  <a:pt x="5312379" y="75369"/>
+                </a:lnTo>
+                <a:lnTo>
+                  <a:pt x="5368894" y="37684"/>
+                </a:lnTo>
+                <a:lnTo>
+                  <a:pt x="5425408" y="0"/>
+                </a:lnTo>
+              </a:path>
+            </a:pathLst>
+          </a:custGeom>
+          <a:noFill/>
+          <a:ln w="38100">
+            <a:solidFill>
+              <a:srgbClr val="8EDBD4"/>
+            </a:solidFill>
+          </a:ln>
+          <a:effectLst/>
+        </p:spPr>
+        <p:txBody>
+          <a:bodyPr rtlCol="0" anchor="ctr"/>
+          <a:lstStyle/>
+          <a:p>
+            <a:pPr algn="ctr"/>
+          </a:p>
+        </p:txBody>
+      </p:sp>
+      <p:sp>
+        <p:nvSpPr>
+          <p:cNvPr id="32" name="C2-E27 ellipse 30" descr="sci-ppt:o030"/>
+          <p:cNvSpPr/>
+          <p:nvPr/>
+        </p:nvSpPr>
+        <p:spPr>
+          <a:xfrm>
+            <a:off x="1831982" y="4345758"/>
+            <a:ext cx="146304" cy="146304"/>
           </a:xfrm>
           <a:prstGeom prst="ellipse">
+            <a:avLst/>
+          </a:prstGeom>
+          <a:solidFill>
+            <a:srgbClr val="7FC8F8"/>
+          </a:solidFill>
+          <a:ln w="12700">
+            <a:solidFill>
+              <a:srgbClr val="7FC8F8"/>
+            </a:solidFill>
+          </a:ln>
+          <a:effectLst/>
+        </p:spPr>
+        <p:txBody>
+          <a:bodyPr rtlCol="0" anchor="ctr"/>
+          <a:lstStyle/>
+          <a:p>
+            <a:pPr algn="ctr"/>
+          </a:p>
+        </p:txBody>
+      </p:sp>
+      <p:sp>
+        <p:nvSpPr>
+          <p:cNvPr id="33" name="C2-E27 text 31" descr="sci-ppt:o031"/>
+          <p:cNvSpPr txBox="1"/>
+          <p:nvPr/>
+        </p:nvSpPr>
+        <p:spPr>
+          <a:xfrm>
+            <a:off x="2014862" y="3961710"/>
+            <a:ext cx="2011680" cy="231648"/>
+          </a:xfrm>
+          <a:prstGeom prst="rect">
+            <a:avLst/>
+          </a:prstGeom>
+          <a:noFill/>
+          <a:effectLst/>
+        </p:spPr>
+        <p:txBody>
+          <a:bodyPr wrap="none" lIns="18288" rIns="18288" tIns="18288" bIns="18288" anchor="t">
+            <a:spAutoFit/>
+          </a:bodyPr>
+          <a:lstStyle/>
+          <a:p>
+            <a:pPr algn="l">
+              <a:spcAft>
+                <a:spcPts val="0"/>
+              </a:spcAft>
+            </a:pPr>
+            <a:r>
+              <a:rPr sz="1200" b="0" i="0">
+                <a:solidFill>
+                  <a:srgbClr val="7FC8F8"/>
+                </a:solidFill>
+                <a:latin typeface="Arial"/>
+              </a:rPr>
+              <a:t>1 µm: 0.006828 ng</a:t>
+            </a:r>
+          </a:p>
+        </p:txBody>
+      </p:sp>
+      <p:sp>
+        <p:nvSpPr>
+          <p:cNvPr id="34" name="C2-E27 ellipse 32" descr="sci-ppt:o032"/>
+          <p:cNvSpPr/>
+          <p:nvPr/>
+        </p:nvSpPr>
+        <p:spPr>
+          <a:xfrm>
+            <a:off x="4132396" y="2811826"/>
+            <a:ext cx="146304" cy="146304"/>
+          </a:xfrm>
+          <a:prstGeom prst="ellipse">
+            <a:avLst/>
+          </a:prstGeom>
+          <a:solidFill>
+            <a:srgbClr val="F2B880"/>
+          </a:solidFill>
+          <a:ln w="12700">
+            <a:solidFill>
+              <a:srgbClr val="F2B880"/>
+            </a:solidFill>
+          </a:ln>
+          <a:effectLst/>
+        </p:spPr>
+        <p:txBody>
+          <a:bodyPr rtlCol="0" anchor="ctr"/>
+          <a:lstStyle/>
+          <a:p>
+            <a:pPr algn="ctr"/>
+          </a:p>
+        </p:txBody>
+      </p:sp>
+      <p:sp>
+        <p:nvSpPr>
+          <p:cNvPr id="35" name="C2-E27 text 33" descr="sci-ppt:o033"/>
+          <p:cNvSpPr txBox="1"/>
+          <p:nvPr/>
+        </p:nvSpPr>
+        <p:spPr>
+          <a:xfrm>
+            <a:off x="4315276" y="2994706"/>
+            <a:ext cx="2011680" cy="231648"/>
+          </a:xfrm>
+          <a:prstGeom prst="rect">
+            <a:avLst/>
+          </a:prstGeom>
+          <a:noFill/>
+          <a:effectLst/>
+        </p:spPr>
+        <p:txBody>
+          <a:bodyPr wrap="none" lIns="18288" rIns="18288" tIns="18288" bIns="18288" anchor="t">
+            <a:spAutoFit/>
+          </a:bodyPr>
+          <a:lstStyle/>
+          <a:p>
+            <a:pPr algn="l">
+              <a:spcAft>
+                <a:spcPts val="0"/>
+              </a:spcAft>
+            </a:pPr>
+            <a:r>
+              <a:rPr sz="1200" b="0" i="0">
+                <a:solidFill>
+                  <a:srgbClr val="F2B880"/>
+                </a:solidFill>
+                <a:latin typeface="Arial"/>
+              </a:rPr>
+              <a:t>5 µm: 0.8535 ng</a:t>
+            </a:r>
+          </a:p>
+        </p:txBody>
+      </p:sp>
+      <p:sp>
+        <p:nvSpPr>
+          <p:cNvPr id="36" name="C2-E27 ellipse 34" descr="sci-ppt:o034"/>
+          <p:cNvSpPr/>
+          <p:nvPr/>
+        </p:nvSpPr>
+        <p:spPr>
+          <a:xfrm>
+            <a:off x="5123131" y="2151198"/>
+            <a:ext cx="146304" cy="146304"/>
+          </a:xfrm>
+          <a:prstGeom prst="ellipse">
+            <a:avLst/>
+          </a:prstGeom>
+          <a:solidFill>
+            <a:srgbClr val="F28BA0"/>
+          </a:solidFill>
+          <a:ln w="12700">
+            <a:solidFill>
+              <a:srgbClr val="F28BA0"/>
+            </a:solidFill>
+          </a:ln>
+          <a:effectLst/>
+        </p:spPr>
+        <p:txBody>
+          <a:bodyPr rtlCol="0" anchor="ctr"/>
+          <a:lstStyle/>
+          <a:p>
+            <a:pPr algn="ctr"/>
+          </a:p>
+        </p:txBody>
+      </p:sp>
+      <p:sp>
+        <p:nvSpPr>
+          <p:cNvPr id="37" name="C2-E27 text 35" descr="sci-ppt:o035"/>
+          <p:cNvSpPr txBox="1"/>
+          <p:nvPr/>
+        </p:nvSpPr>
+        <p:spPr>
+          <a:xfrm>
+            <a:off x="3047443" y="1767150"/>
+            <a:ext cx="2011680" cy="231648"/>
+          </a:xfrm>
+          <a:prstGeom prst="rect">
+            <a:avLst/>
+          </a:prstGeom>
+          <a:noFill/>
+          <a:effectLst/>
+        </p:spPr>
+        <p:txBody>
+          <a:bodyPr wrap="none" lIns="18288" rIns="18288" tIns="18288" bIns="18288" anchor="t">
+            <a:spAutoFit/>
+          </a:bodyPr>
+          <a:lstStyle/>
+          <a:p>
+            <a:pPr algn="l">
+              <a:spcAft>
+                <a:spcPts val="0"/>
+              </a:spcAft>
+            </a:pPr>
+            <a:r>
+              <a:rPr sz="1200" b="0" i="0">
+                <a:solidFill>
+                  <a:srgbClr val="F28BA0"/>
+                </a:solidFill>
+                <a:latin typeface="Arial"/>
+              </a:rPr>
+              <a:t>10 µm: 6.828 ng</a:t>
+            </a:r>
+          </a:p>
+        </p:txBody>
+      </p:sp>
+      <p:sp>
+        <p:nvSpPr>
+          <p:cNvPr id="38" name="C2-E27 round_rect 36" descr="sci-ppt:o036"/>
+          <p:cNvSpPr/>
+          <p:nvPr/>
+        </p:nvSpPr>
+        <p:spPr>
+          <a:xfrm>
+            <a:off x="7040880" y="1371600"/>
+            <a:ext cx="4800600" cy="3657600"/>
+          </a:xfrm>
+          <a:prstGeom prst="roundRect">
             <a:avLst/>
           </a:prstGeom>
           <a:solidFill>
             <a:srgbClr val="213E4B"/>
           </a:solidFill>
-          <a:ln w="21590">
+          <a:ln w="20320">
             <a:solidFill>
-              <a:srgbClr val="B4C7D2"/>
+              <a:srgbClr val="8EDBD4"/>
             </a:solidFill>
           </a:ln>
           <a:effectLst/>
@@ -3168,40 +4509,16 @@
           </a:p>
         </p:txBody>
       </p:sp>
-      <p:cxnSp>
-        <p:nvCxnSpPr>
-          <p:cNvPr id="4" name="arrow3" descr="sci-ppt:C2-E27-003"/>
-          <p:cNvCxnSpPr/>
-          <p:nvPr/>
-        </p:nvCxnSpPr>
-        <p:spPr>
-          <a:xfrm>
-            <a:off x="3291840" y="2621280"/>
-            <a:ext cx="1219200" cy="0"/>
-          </a:xfrm>
-          <a:prstGeom prst="line">
-            <a:avLst/>
-          </a:prstGeom>
-          <a:ln w="25400">
-            <a:solidFill>
-              <a:srgbClr val="8EDBD4"/>
-            </a:solidFill>
-            <a:headEnd type="none" w="med" len="med"/>
-            <a:tailEnd type="triangle" w="med" len="med"/>
-          </a:ln>
-          <a:effectLst/>
-        </p:spPr>
-      </p:cxnSp>
-      <p:sp>
-        <p:nvSpPr>
-          <p:cNvPr id="5" name="text4" descr="sci-ppt:C2-E27-004"/>
+      <p:sp>
+        <p:nvSpPr>
+          <p:cNvPr id="39" name="C2-E27 text 37" descr="sci-ppt:o037"/>
           <p:cNvSpPr txBox="1"/>
           <p:nvPr/>
         </p:nvSpPr>
         <p:spPr>
           <a:xfrm>
-            <a:off x="3474720" y="2133600"/>
-            <a:ext cx="1584960" cy="396849"/>
+            <a:off x="7150608" y="1426464"/>
+            <a:ext cx="4581144" cy="247142"/>
           </a:xfrm>
           <a:prstGeom prst="rect">
             <a:avLst/>
@@ -3210,7 +4527,7 @@
           <a:effectLst/>
         </p:spPr>
         <p:txBody>
-          <a:bodyPr wrap="none" lIns="27432" rIns="27432" tIns="18288" bIns="18288" anchor="ctr">
+          <a:bodyPr wrap="none" lIns="18288" rIns="18288" tIns="18288" bIns="18288" anchor="t">
             <a:spAutoFit/>
           </a:bodyPr>
           <a:lstStyle/>
@@ -3221,27 +4538,67 @@
               </a:spcAft>
             </a:pPr>
             <a:r>
-              <a:rPr sz="2016" b="0" i="0">
+              <a:rPr sz="1300" b="1" i="0">
+                <a:solidFill>
+                  <a:srgbClr val="8EDBD4"/>
+                </a:solidFill>
+                <a:latin typeface="Arial"/>
+              </a:rPr>
+              <a:t>Start every ledger from the real volume</a:t>
+            </a:r>
+          </a:p>
+        </p:txBody>
+      </p:sp>
+      <p:sp>
+        <p:nvSpPr>
+          <p:cNvPr id="40" name="C2-E27 text 38" descr="sci-ppt:o038"/>
+          <p:cNvSpPr txBox="1"/>
+          <p:nvPr/>
+        </p:nvSpPr>
+        <p:spPr>
+          <a:xfrm>
+            <a:off x="7178040" y="1828800"/>
+            <a:ext cx="4572000" cy="254889"/>
+          </a:xfrm>
+          <a:prstGeom prst="rect">
+            <a:avLst/>
+          </a:prstGeom>
+          <a:noFill/>
+          <a:effectLst/>
+        </p:spPr>
+        <p:txBody>
+          <a:bodyPr wrap="none" lIns="18288" rIns="18288" tIns="18288" bIns="18288" anchor="t">
+            <a:spAutoFit/>
+          </a:bodyPr>
+          <a:lstStyle/>
+          <a:p>
+            <a:pPr algn="l">
+              <a:spcAft>
+                <a:spcPts val="0"/>
+              </a:spcAft>
+            </a:pPr>
+            <a:r>
+              <a:rPr sz="1350" b="1" i="0">
                 <a:solidFill>
                   <a:srgbClr val="E7F0F3"/>
                 </a:solidFill>
                 <a:latin typeface="Arial"/>
               </a:rPr>
-              <a:t>a</a:t>
-            </a:r>
-          </a:p>
-        </p:txBody>
-      </p:sp>
-      <p:sp>
-        <p:nvSpPr>
-          <p:cNvPr id="6" name="text5" descr="sci-ppt:C2-E27-005"/>
+              <a:t>m_PFC,0 = (4π/3)(1630)(5×10⁻⁶)³</a:t>
+            </a:r>
+          </a:p>
+        </p:txBody>
+      </p:sp>
+      <p:sp>
+        <p:nvSpPr>
+          <p:cNvPr id="41" name="C2-E27 text 39" descr="sci-ppt:o039"/>
           <p:cNvSpPr txBox="1"/>
           <p:nvPr/>
         </p:nvSpPr>
         <p:spPr>
           <a:xfrm>
-            <a:off x="2682240" y="2804160"/>
-            <a:ext cx="2194560" cy="377952"/>
+            <a:off x="7178040" y="2331720"/>
+            <a:ext cx="4572000" cy="278130"/>
           </a:xfrm>
           <a:prstGeom prst="rect">
             <a:avLst/>
@@ -3250,7 +4607,7 @@
           <a:effectLst/>
         </p:spPr>
         <p:txBody>
-          <a:bodyPr wrap="none" lIns="27432" rIns="27432" tIns="18288" bIns="18288" anchor="ctr">
+          <a:bodyPr wrap="none" lIns="18288" rIns="18288" tIns="18288" bIns="18288" anchor="t">
             <a:spAutoFit/>
           </a:bodyPr>
           <a:lstStyle/>
@@ -3261,27 +4618,99 @@
               </a:spcAft>
             </a:pPr>
             <a:r>
-              <a:rPr sz="1920" b="0" i="0">
+              <a:rPr sz="1500" b="1" i="0">
+                <a:solidFill>
+                  <a:srgbClr val="F2B880"/>
+                </a:solidFill>
+                <a:latin typeface="Arial"/>
+              </a:rPr>
+              <a:t>= 8.5347×10⁻¹³ kg = 0.8535 ng</a:t>
+            </a:r>
+          </a:p>
+        </p:txBody>
+      </p:sp>
+      <p:sp>
+        <p:nvSpPr>
+          <p:cNvPr id="42" name="C2-E27 ellipse 40" descr="sci-ppt:o040"/>
+          <p:cNvSpPr/>
+          <p:nvPr/>
+        </p:nvSpPr>
+        <p:spPr>
+          <a:xfrm>
+            <a:off x="7406640" y="2926079"/>
+            <a:ext cx="1645920" cy="1645920"/>
+          </a:xfrm>
+          <a:prstGeom prst="ellipse">
+            <a:avLst/>
+          </a:prstGeom>
+          <a:solidFill>
+            <a:srgbClr val="1E4A5A"/>
+          </a:solidFill>
+          <a:ln w="25400">
+            <a:solidFill>
+              <a:srgbClr val="8EDBD4"/>
+            </a:solidFill>
+          </a:ln>
+          <a:effectLst/>
+        </p:spPr>
+        <p:txBody>
+          <a:bodyPr rtlCol="0" anchor="ctr"/>
+          <a:lstStyle/>
+          <a:p>
+            <a:pPr algn="ctr"/>
+          </a:p>
+        </p:txBody>
+      </p:sp>
+      <p:sp>
+        <p:nvSpPr>
+          <p:cNvPr id="43" name="C2-E27 text 41" descr="sci-ppt:o041"/>
+          <p:cNvSpPr txBox="1"/>
+          <p:nvPr/>
+        </p:nvSpPr>
+        <p:spPr>
+          <a:xfrm>
+            <a:off x="7315200" y="3611880"/>
+            <a:ext cx="1828800" cy="239395"/>
+          </a:xfrm>
+          <a:prstGeom prst="rect">
+            <a:avLst/>
+          </a:prstGeom>
+          <a:noFill/>
+          <a:effectLst/>
+        </p:spPr>
+        <p:txBody>
+          <a:bodyPr wrap="none" lIns="18288" rIns="18288" tIns="18288" bIns="18288" anchor="t">
+            <a:spAutoFit/>
+          </a:bodyPr>
+          <a:lstStyle/>
+          <a:p>
+            <a:pPr algn="ctr">
+              <a:spcAft>
+                <a:spcPts val="0"/>
+              </a:spcAft>
+            </a:pPr>
+            <a:r>
+              <a:rPr sz="1250" b="1" i="0">
                 <a:solidFill>
                   <a:srgbClr val="E7F0F3"/>
                 </a:solidFill>
                 <a:latin typeface="Arial"/>
               </a:rPr>
-              <a:t>PFC liquid</a:t>
-            </a:r>
-          </a:p>
-        </p:txBody>
-      </p:sp>
-      <p:sp>
-        <p:nvSpPr>
-          <p:cNvPr id="7" name="text6" descr="sci-ppt:C2-E27-006"/>
+              <a:t>5 µm</a:t>
+            </a:r>
+          </a:p>
+        </p:txBody>
+      </p:sp>
+      <p:sp>
+        <p:nvSpPr>
+          <p:cNvPr id="44" name="C2-E27 text 42" descr="sci-ppt:o042"/>
           <p:cNvSpPr txBox="1"/>
           <p:nvPr/>
         </p:nvSpPr>
         <p:spPr>
           <a:xfrm>
-            <a:off x="5242560" y="1524000"/>
-            <a:ext cx="4876800" cy="415747"/>
+            <a:off x="9326880" y="3291840"/>
+            <a:ext cx="2377440" cy="433070"/>
           </a:xfrm>
           <a:prstGeom prst="rect">
             <a:avLst/>
@@ -3290,7 +4719,7 @@
           <a:effectLst/>
         </p:spPr>
         <p:txBody>
-          <a:bodyPr wrap="none" lIns="27432" rIns="27432" tIns="18288" bIns="18288" anchor="ctr">
+          <a:bodyPr wrap="none" lIns="18288" rIns="18288" tIns="18288" bIns="18288" anchor="t">
             <a:spAutoFit/>
           </a:bodyPr>
           <a:lstStyle/>
@@ -3301,27 +4730,43 @@
               </a:spcAft>
             </a:pPr>
             <a:r>
-              <a:rPr sz="2111" b="0" i="0">
+              <a:rPr sz="1250" b="0" i="0">
                 <a:solidFill>
                   <a:srgbClr val="E7F0F3"/>
                 </a:solidFill>
                 <a:latin typeface="Arial"/>
               </a:rPr>
-              <a:t>Aqueous carrier</a:t>
-            </a:r>
-          </a:p>
-        </p:txBody>
-      </p:sp>
-      <p:sp>
-        <p:nvSpPr>
-          <p:cNvPr id="8" name="text7" descr="sci-ppt:C2-E27-007"/>
+              <a:t>about 0.85 nanogram,</a:t>
+            </a:r>
+          </a:p>
+          <a:p>
+            <a:pPr algn="l">
+              <a:spcAft>
+                <a:spcPts val="0"/>
+              </a:spcAft>
+            </a:pPr>
+            <a:r>
+              <a:rPr sz="1250" b="0" i="0">
+                <a:solidFill>
+                  <a:srgbClr val="E7F0F3"/>
+                </a:solidFill>
+                <a:latin typeface="Arial"/>
+              </a:rPr>
+              <a:t>a fixed, finite budget</a:t>
+            </a:r>
+          </a:p>
+        </p:txBody>
+      </p:sp>
+      <p:sp>
+        <p:nvSpPr>
+          <p:cNvPr id="45" name="C2-E27 text 43" descr="sci-ppt:o043"/>
           <p:cNvSpPr txBox="1"/>
           <p:nvPr/>
         </p:nvSpPr>
         <p:spPr>
           <a:xfrm>
-            <a:off x="5242560" y="1987296"/>
-            <a:ext cx="5852160" cy="359054"/>
+            <a:off x="914400" y="5733288"/>
+            <a:ext cx="10972800" cy="433070"/>
           </a:xfrm>
           <a:prstGeom prst="rect">
             <a:avLst/>
@@ -3330,7 +4775,7 @@
           <a:effectLst/>
         </p:spPr>
         <p:txBody>
-          <a:bodyPr wrap="none" lIns="27432" rIns="27432" tIns="18288" bIns="18288" anchor="ctr">
+          <a:bodyPr wrap="none" lIns="18288" rIns="18288" tIns="18288" bIns="18288" anchor="t">
             <a:spAutoFit/>
           </a:bodyPr>
           <a:lstStyle/>
@@ -3341,27 +4786,43 @@
               </a:spcAft>
             </a:pPr>
             <a:r>
-              <a:rPr sz="1823" b="0" i="0">
+              <a:rPr sz="1250" b="0" i="0">
                 <a:solidFill>
                   <a:srgbClr val="E7F0F3"/>
                 </a:solidFill>
                 <a:latin typeface="Arial"/>
               </a:rPr>
-              <a:t>p_c; interface: σ_pc, shell</a:t>
-            </a:r>
-          </a:p>
-        </p:txBody>
-      </p:sp>
-      <p:sp>
-        <p:nvSpPr>
-          <p:cNvPr id="9" name="text8" descr="sci-ppt:C2-E27-008"/>
+              <a:t>Mass scales as a³: a 10 µm core carries eight times as much PFC as a 5 µm core. Every later vapor amount is bounded by this</a:t>
+            </a:r>
+          </a:p>
+          <a:p>
+            <a:pPr algn="l">
+              <a:spcAft>
+                <a:spcPts val="0"/>
+              </a:spcAft>
+            </a:pPr>
+            <a:r>
+              <a:rPr sz="1250" b="0" i="0">
+                <a:solidFill>
+                  <a:srgbClr val="E7F0F3"/>
+                </a:solidFill>
+                <a:latin typeface="Arial"/>
+              </a:rPr>
+              <a:t>number.</a:t>
+            </a:r>
+          </a:p>
+        </p:txBody>
+      </p:sp>
+      <p:sp>
+        <p:nvSpPr>
+          <p:cNvPr id="46" name="C2-E27 text 44" descr="sci-ppt:o044"/>
           <p:cNvSpPr txBox="1"/>
           <p:nvPr/>
         </p:nvSpPr>
         <p:spPr>
           <a:xfrm>
-            <a:off x="1219200" y="4206240"/>
-            <a:ext cx="9753600" cy="340156"/>
+            <a:off x="320040" y="6510528"/>
+            <a:ext cx="11521440" cy="200660"/>
           </a:xfrm>
           <a:prstGeom prst="rect">
             <a:avLst/>
@@ -3370,7 +4831,7 @@
           <a:effectLst/>
         </p:spPr>
         <p:txBody>
-          <a:bodyPr wrap="none" lIns="27432" rIns="27432" tIns="18288" bIns="18288" anchor="ctr">
+          <a:bodyPr wrap="none" lIns="18288" rIns="18288" tIns="18288" bIns="18288" anchor="t">
             <a:spAutoFit/>
           </a:bodyPr>
           <a:lstStyle/>
@@ -3381,253 +4842,13 @@
               </a:spcAft>
             </a:pPr>
             <a:r>
-              <a:rPr sz="1728" b="0" i="0">
-                <a:solidFill>
-                  <a:srgbClr val="E7F0F3"/>
-                </a:solidFill>
-                <a:latin typeface="Arial"/>
-              </a:rPr>
-              <a:t>Finite liquid core: a differs from subsequent bubble radius R.</a:t>
-            </a:r>
-          </a:p>
-        </p:txBody>
-      </p:sp>
-      <p:sp>
-        <p:nvSpPr>
-          <p:cNvPr id="10" name="text9" descr="sci-ppt:C2-E27-009"/>
-          <p:cNvSpPr txBox="1"/>
-          <p:nvPr/>
-        </p:nvSpPr>
-        <p:spPr>
-          <a:xfrm>
-            <a:off x="365760" y="4974336"/>
-            <a:ext cx="5547360" cy="321259"/>
-          </a:xfrm>
-          <a:prstGeom prst="rect">
-            <a:avLst/>
-          </a:prstGeom>
-          <a:noFill/>
-          <a:effectLst/>
-        </p:spPr>
-        <p:txBody>
-          <a:bodyPr wrap="none" lIns="27432" rIns="27432" tIns="18288" bIns="18288" anchor="ctr">
-            <a:spAutoFit/>
-          </a:bodyPr>
-          <a:lstStyle/>
-          <a:p>
-            <a:pPr algn="l">
-              <a:spcAft>
-                <a:spcPts val="0"/>
-              </a:spcAft>
-            </a:pPr>
-            <a:r>
-              <a:rPr sz="1632" b="0" i="0">
-                <a:solidFill>
-                  <a:srgbClr val="E7F0F3"/>
-                </a:solidFill>
-                <a:latin typeface="Arial"/>
-              </a:rPr>
-              <a:t>a₀ = 5 μm</a:t>
-            </a:r>
-          </a:p>
-        </p:txBody>
-      </p:sp>
-      <p:sp>
-        <p:nvSpPr>
-          <p:cNvPr id="11" name="text10" descr="sci-ppt:C2-E27-010"/>
-          <p:cNvSpPr txBox="1"/>
-          <p:nvPr/>
-        </p:nvSpPr>
-        <p:spPr>
-          <a:xfrm>
-            <a:off x="365760" y="5266944"/>
-            <a:ext cx="5547360" cy="321259"/>
-          </a:xfrm>
-          <a:prstGeom prst="rect">
-            <a:avLst/>
-          </a:prstGeom>
-          <a:noFill/>
-          <a:effectLst/>
-        </p:spPr>
-        <p:txBody>
-          <a:bodyPr wrap="none" lIns="27432" rIns="27432" tIns="18288" bIns="18288" anchor="ctr">
-            <a:spAutoFit/>
-          </a:bodyPr>
-          <a:lstStyle/>
-          <a:p>
-            <a:pPr algn="l">
-              <a:spcAft>
-                <a:spcPts val="0"/>
-              </a:spcAft>
-            </a:pPr>
-            <a:r>
-              <a:rPr sz="1632" b="0" i="0">
-                <a:solidFill>
-                  <a:srgbClr val="E7F0F3"/>
-                </a:solidFill>
-                <a:latin typeface="Arial"/>
-              </a:rPr>
-              <a:t>m_PFC,0 = 0.853466 ng</a:t>
-            </a:r>
-          </a:p>
-        </p:txBody>
-      </p:sp>
-      <p:sp>
-        <p:nvSpPr>
-          <p:cNvPr id="12" name="text11" descr="sci-ppt:C2-E27-011"/>
-          <p:cNvSpPr txBox="1"/>
-          <p:nvPr/>
-        </p:nvSpPr>
-        <p:spPr>
-          <a:xfrm>
-            <a:off x="6156960" y="4974336"/>
-            <a:ext cx="5547360" cy="321259"/>
-          </a:xfrm>
-          <a:prstGeom prst="rect">
-            <a:avLst/>
-          </a:prstGeom>
-          <a:noFill/>
-          <a:effectLst/>
-        </p:spPr>
-        <p:txBody>
-          <a:bodyPr wrap="none" lIns="27432" rIns="27432" tIns="18288" bIns="18288" anchor="ctr">
-            <a:spAutoFit/>
-          </a:bodyPr>
-          <a:lstStyle/>
-          <a:p>
-            <a:pPr algn="l">
-              <a:spcAft>
-                <a:spcPts val="0"/>
-              </a:spcAft>
-            </a:pPr>
-            <a:r>
-              <a:rPr sz="1632" b="0" i="0">
-                <a:solidFill>
-                  <a:srgbClr val="E7F0F3"/>
-                </a:solidFill>
-                <a:latin typeface="Arial"/>
-              </a:rPr>
-              <a:t>ρ_d = 1630 kg/m³</a:t>
-            </a:r>
-          </a:p>
-        </p:txBody>
-      </p:sp>
-      <p:sp>
-        <p:nvSpPr>
-          <p:cNvPr id="13" name="text12" descr="sci-ppt:C2-E27-012"/>
-          <p:cNvSpPr txBox="1"/>
-          <p:nvPr/>
-        </p:nvSpPr>
-        <p:spPr>
-          <a:xfrm>
-            <a:off x="6156960" y="5266944"/>
-            <a:ext cx="5547360" cy="321259"/>
-          </a:xfrm>
-          <a:prstGeom prst="rect">
-            <a:avLst/>
-          </a:prstGeom>
-          <a:noFill/>
-          <a:effectLst/>
-        </p:spPr>
-        <p:txBody>
-          <a:bodyPr wrap="none" lIns="27432" rIns="27432" tIns="18288" bIns="18288" anchor="ctr">
-            <a:spAutoFit/>
-          </a:bodyPr>
-          <a:lstStyle/>
-          <a:p>
-            <a:pPr algn="l">
-              <a:spcAft>
-                <a:spcPts val="0"/>
-              </a:spcAft>
-            </a:pPr>
-            <a:r>
-              <a:rPr sz="1632" b="0" i="0">
-                <a:solidFill>
-                  <a:srgbClr val="E7F0F3"/>
-                </a:solidFill>
-                <a:latin typeface="Arial"/>
-              </a:rPr>
-              <a:t>π: spherical volume</a:t>
-            </a:r>
-          </a:p>
-        </p:txBody>
-      </p:sp>
-      <p:sp>
-        <p:nvSpPr>
-          <p:cNvPr id="14" name="text13" descr="sci-ppt:C2-E27-013"/>
-          <p:cNvSpPr txBox="1"/>
-          <p:nvPr/>
-        </p:nvSpPr>
-        <p:spPr>
-          <a:xfrm>
-            <a:off x="365760" y="6278880"/>
-            <a:ext cx="11277600" cy="302361"/>
-          </a:xfrm>
-          <a:prstGeom prst="rect">
-            <a:avLst/>
-          </a:prstGeom>
-          <a:noFill/>
-          <a:effectLst/>
-        </p:spPr>
-        <p:txBody>
-          <a:bodyPr wrap="none" lIns="27432" rIns="27432" tIns="18288" bIns="18288" anchor="ctr">
-            <a:spAutoFit/>
-          </a:bodyPr>
-          <a:lstStyle/>
-          <a:p>
-            <a:pPr algn="l">
-              <a:spcAft>
-                <a:spcPts val="0"/>
-              </a:spcAft>
-            </a:pPr>
-            <a:r>
-              <a:rPr sz="1536" b="0" i="0">
+              <a:rPr sz="1000" b="0" i="0">
                 <a:solidFill>
                   <a:srgbClr val="B4C7D2"/>
                 </a:solidFill>
                 <a:latin typeface="Arial"/>
               </a:rPr>
-              <a:t>This is a micron-scale teaching core</a:t>
-            </a:r>
-          </a:p>
-        </p:txBody>
-      </p:sp>
-      <p:sp>
-        <p:nvSpPr>
-          <p:cNvPr id="15" name="text14" descr="sci-ppt:C2-E27-014"/>
-          <p:cNvSpPr txBox="1"/>
-          <p:nvPr/>
-        </p:nvSpPr>
-        <p:spPr>
-          <a:xfrm>
-            <a:off x="365760" y="6571488"/>
-            <a:ext cx="11277600" cy="302361"/>
-          </a:xfrm>
-          <a:prstGeom prst="rect">
-            <a:avLst/>
-          </a:prstGeom>
-          <a:noFill/>
-          <a:effectLst/>
-        </p:spPr>
-        <p:txBody>
-          <a:bodyPr wrap="none" lIns="27432" rIns="27432" tIns="18288" bIns="18288" anchor="ctr">
-            <a:spAutoFit/>
-          </a:bodyPr>
-          <a:lstStyle/>
-          <a:p>
-            <a:pPr algn="l">
-              <a:spcAft>
-                <a:spcPts val="0"/>
-              </a:spcAft>
-            </a:pPr>
-            <a:r>
-              <a:rPr sz="1536" b="0" i="0">
-                <a:solidFill>
-                  <a:srgbClr val="B4C7D2"/>
-                </a:solidFill>
-                <a:latin typeface="Arial"/>
-              </a:rPr>
-              <a:t>All later PFC phases share this mass inventory</a:t>
+              <a:t>Initial PFC mass of Eq. C2-E27 (ρ_d = 1630 kg/m³).</a:t>
             </a:r>
           </a:p>
         </p:txBody>
